--- a/examples/vivid.pptx
+++ b/examples/vivid.pptx
@@ -14,6 +14,7 @@
     <p:sldId id="262" r:id="rId13"/>
     <p:sldId id="263" r:id="rId14"/>
     <p:sldId id="264" r:id="rId15"/>
+    <p:sldId id="265" r:id="rId16"/>
   </p:sldIdLst>
   <p:sldSz cx="12192000" cy="6858000" type="screen4x3"/>
   <p:notesSz cx="6858000" cy="9144000"/>
@@ -3985,7 +3986,7 @@
         <p:spPr>
           <a:xfrm>
             <a:off x="8232725" y="5029200"/>
-            <a:ext cx="866775" cy="276225"/>
+            <a:ext cx="619125" cy="276225"/>
           </a:xfrm>
           <a:prstGeom prst="roundRect">
             <a:avLst>
@@ -4030,8 +4031,8 @@
         </p:nvSpPr>
         <p:spPr>
           <a:xfrm>
-            <a:off x="9175700" y="5029200"/>
-            <a:ext cx="619125" cy="276225"/>
+            <a:off x="8928050" y="5029200"/>
+            <a:ext cx="866775" cy="276225"/>
           </a:xfrm>
           <a:prstGeom prst="roundRect">
             <a:avLst>
@@ -4077,7 +4078,7 @@
         <p:spPr>
           <a:xfrm>
             <a:off x="9871025" y="5029200"/>
-            <a:ext cx="742950" cy="276225"/>
+            <a:ext cx="619125" cy="276225"/>
           </a:xfrm>
           <a:prstGeom prst="roundRect">
             <a:avLst>
@@ -4123,7 +4124,7 @@
         <p:spPr>
           <a:xfrm>
             <a:off x="8232725" y="5381625"/>
-            <a:ext cx="495300" cy="276225"/>
+            <a:ext cx="742950" cy="276225"/>
           </a:xfrm>
           <a:prstGeom prst="roundRect">
             <a:avLst>
@@ -4160,9 +4161,55 @@
           <a:p/>
         </p:txBody>
       </p:sp>
+      <p:sp>
+        <p:nvSpPr>
+          <p:cNvPr id="25" name="Rounded Rectangle 24"/>
+          <p:cNvSpPr/>
+          <p:nvPr/>
+        </p:nvSpPr>
+        <p:spPr>
+          <a:xfrm>
+            <a:off x="9051875" y="5381625"/>
+            <a:ext cx="495300" cy="276225"/>
+          </a:xfrm>
+          <a:prstGeom prst="roundRect">
+            <a:avLst>
+              <a:gd name="adj" fmla="val 50000"/>
+            </a:avLst>
+          </a:prstGeom>
+          <a:noFill/>
+          <a:ln w="9525">
+            <a:solidFill>
+              <a:srgbClr val="3B2A20">
+                <a:alpha val="35000"/>
+              </a:srgbClr>
+            </a:solidFill>
+          </a:ln>
+          <a:effectLst/>
+        </p:spPr>
+        <p:style>
+          <a:lnRef idx="1">
+            <a:schemeClr val="accent1"/>
+          </a:lnRef>
+          <a:fillRef idx="3">
+            <a:schemeClr val="accent1"/>
+          </a:fillRef>
+          <a:effectRef idx="2">
+            <a:schemeClr val="accent1"/>
+          </a:effectRef>
+          <a:fontRef idx="minor">
+            <a:schemeClr val="lt1"/>
+          </a:fontRef>
+        </p:style>
+        <p:txBody>
+          <a:bodyPr rtlCol="0" anchor="ctr"/>
+          <a:lstStyle/>
+          <a:p/>
+        </p:txBody>
+      </p:sp>
       <p:pic>
         <p:nvPicPr>
-          <p:cNvPr id="25" name="Picture 24" descr="icon-sparkles-2338519443.png"/>
+          <p:cNvPr id="26" name="Picture 25" descr="icon-sparkles-2338519443.png"/>
           <p:cNvPicPr>
             <a:picLocks noChangeAspect="1"/>
           </p:cNvPicPr>
@@ -4186,7 +4233,7 @@
       </p:pic>
       <p:pic>
         <p:nvPicPr>
-          <p:cNvPr id="26" name="Picture 25" descr="icon-heart-d667042594.png"/>
+          <p:cNvPr id="27" name="Picture 26" descr="icon-heart-d667042594.png"/>
           <p:cNvPicPr>
             <a:picLocks noChangeAspect="1"/>
           </p:cNvPicPr>
@@ -4210,7 +4257,7 @@
       </p:pic>
       <p:pic>
         <p:nvPicPr>
-          <p:cNvPr id="27" name="Picture 26" descr="icon-leaf-0428386138.png"/>
+          <p:cNvPr id="28" name="Picture 27" descr="icon-leaf-0428386138.png"/>
           <p:cNvPicPr>
             <a:picLocks noChangeAspect="1"/>
           </p:cNvPicPr>
@@ -4234,7 +4281,7 @@
       </p:pic>
       <p:pic>
         <p:nvPicPr>
-          <p:cNvPr id="28" name="Picture 27" descr="icon-compass-39916e467e.png"/>
+          <p:cNvPr id="29" name="Picture 28" descr="icon-compass-39916e467e.png"/>
           <p:cNvPicPr>
             <a:picLocks noChangeAspect="1"/>
           </p:cNvPicPr>
@@ -4258,7 +4305,7 @@
       </p:pic>
       <p:sp>
         <p:nvSpPr>
-          <p:cNvPr id="29" name="TextBox 28"/>
+          <p:cNvPr id="30" name="TextBox 29"/>
           <p:cNvSpPr txBox="1"/>
           <p:nvPr/>
         </p:nvSpPr>
@@ -4298,7 +4345,7 @@
       </p:sp>
       <p:sp>
         <p:nvSpPr>
-          <p:cNvPr id="30" name="TextBox 29"/>
+          <p:cNvPr id="31" name="TextBox 30"/>
           <p:cNvSpPr txBox="1"/>
           <p:nvPr/>
         </p:nvSpPr>
@@ -4338,7 +4385,7 @@
       </p:sp>
       <p:sp>
         <p:nvSpPr>
-          <p:cNvPr id="31" name="TextBox 30"/>
+          <p:cNvPr id="32" name="TextBox 31"/>
           <p:cNvSpPr txBox="1"/>
           <p:nvPr/>
         </p:nvSpPr>
@@ -4378,7 +4425,7 @@
       </p:sp>
       <p:sp>
         <p:nvSpPr>
-          <p:cNvPr id="32" name="TextBox 31"/>
+          <p:cNvPr id="33" name="TextBox 32"/>
           <p:cNvSpPr txBox="1"/>
           <p:nvPr/>
         </p:nvSpPr>
@@ -4420,7 +4467,7 @@
       </p:sp>
       <p:sp>
         <p:nvSpPr>
-          <p:cNvPr id="33" name="TextBox 32"/>
+          <p:cNvPr id="34" name="TextBox 33"/>
           <p:cNvSpPr txBox="1"/>
           <p:nvPr/>
         </p:nvSpPr>
@@ -4462,7 +4509,7 @@
       </p:sp>
       <p:sp>
         <p:nvSpPr>
-          <p:cNvPr id="34" name="TextBox 33"/>
+          <p:cNvPr id="35" name="TextBox 34"/>
           <p:cNvSpPr txBox="1"/>
           <p:nvPr/>
         </p:nvSpPr>
@@ -4504,7 +4551,7 @@
       </p:sp>
       <p:sp>
         <p:nvSpPr>
-          <p:cNvPr id="35" name="TextBox 34"/>
+          <p:cNvPr id="36" name="TextBox 35"/>
           <p:cNvSpPr txBox="1"/>
           <p:nvPr/>
         </p:nvSpPr>
@@ -4546,7 +4593,7 @@
       </p:sp>
       <p:sp>
         <p:nvSpPr>
-          <p:cNvPr id="36" name="TextBox 35"/>
+          <p:cNvPr id="37" name="TextBox 36"/>
           <p:cNvSpPr txBox="1"/>
           <p:nvPr/>
         </p:nvSpPr>
@@ -4588,7 +4635,7 @@
       </p:sp>
       <p:sp>
         <p:nvSpPr>
-          <p:cNvPr id="37" name="TextBox 36"/>
+          <p:cNvPr id="38" name="TextBox 37"/>
           <p:cNvSpPr txBox="1"/>
           <p:nvPr/>
         </p:nvSpPr>
@@ -4630,7 +4677,7 @@
       </p:sp>
       <p:sp>
         <p:nvSpPr>
-          <p:cNvPr id="38" name="TextBox 37"/>
+          <p:cNvPr id="39" name="TextBox 38"/>
           <p:cNvSpPr txBox="1"/>
           <p:nvPr/>
         </p:nvSpPr>
@@ -4672,7 +4719,7 @@
       </p:sp>
       <p:sp>
         <p:nvSpPr>
-          <p:cNvPr id="39" name="TextBox 38"/>
+          <p:cNvPr id="40" name="TextBox 39"/>
           <p:cNvSpPr txBox="1"/>
           <p:nvPr/>
         </p:nvSpPr>
@@ -4714,7 +4761,7 @@
       </p:sp>
       <p:sp>
         <p:nvSpPr>
-          <p:cNvPr id="40" name="TextBox 39"/>
+          <p:cNvPr id="41" name="TextBox 40"/>
           <p:cNvSpPr txBox="1"/>
           <p:nvPr/>
         </p:nvSpPr>
@@ -4756,7 +4803,7 @@
       </p:sp>
       <p:sp>
         <p:nvSpPr>
-          <p:cNvPr id="41" name="TextBox 40"/>
+          <p:cNvPr id="42" name="TextBox 41"/>
           <p:cNvSpPr txBox="1"/>
           <p:nvPr/>
         </p:nvSpPr>
@@ -4796,7 +4843,7 @@
       </p:sp>
       <p:sp>
         <p:nvSpPr>
-          <p:cNvPr id="42" name="TextBox 41"/>
+          <p:cNvPr id="43" name="TextBox 42"/>
           <p:cNvSpPr txBox="1"/>
           <p:nvPr/>
         </p:nvSpPr>
@@ -4836,7 +4883,7 @@
       </p:sp>
       <p:sp>
         <p:nvSpPr>
-          <p:cNvPr id="43" name="TextBox 42"/>
+          <p:cNvPr id="44" name="TextBox 43"/>
           <p:cNvSpPr txBox="1"/>
           <p:nvPr/>
         </p:nvSpPr>
@@ -4876,7 +4923,7 @@
       </p:sp>
       <p:sp>
         <p:nvSpPr>
-          <p:cNvPr id="44" name="TextBox 43"/>
+          <p:cNvPr id="45" name="TextBox 44"/>
           <p:cNvSpPr txBox="1"/>
           <p:nvPr/>
         </p:nvSpPr>
@@ -4916,7 +4963,7 @@
       </p:sp>
       <p:sp>
         <p:nvSpPr>
-          <p:cNvPr id="45" name="TextBox 44"/>
+          <p:cNvPr id="46" name="TextBox 45"/>
           <p:cNvSpPr txBox="1"/>
           <p:nvPr/>
         </p:nvSpPr>
@@ -4956,7 +5003,7 @@
       </p:sp>
       <p:sp>
         <p:nvSpPr>
-          <p:cNvPr id="46" name="TextBox 45"/>
+          <p:cNvPr id="47" name="TextBox 46"/>
           <p:cNvSpPr txBox="1"/>
           <p:nvPr/>
         </p:nvSpPr>
@@ -4996,7 +5043,7 @@
       </p:sp>
       <p:sp>
         <p:nvSpPr>
-          <p:cNvPr id="47" name="TextBox 46"/>
+          <p:cNvPr id="48" name="TextBox 47"/>
           <p:cNvSpPr txBox="1"/>
           <p:nvPr/>
         </p:nvSpPr>
@@ -5036,7 +5083,7 @@
       </p:sp>
       <p:sp>
         <p:nvSpPr>
-          <p:cNvPr id="48" name="TextBox 47"/>
+          <p:cNvPr id="49" name="TextBox 48"/>
           <p:cNvSpPr txBox="1"/>
           <p:nvPr/>
         </p:nvSpPr>
@@ -5076,7 +5123,7 @@
       </p:sp>
       <p:sp>
         <p:nvSpPr>
-          <p:cNvPr id="49" name="TextBox 48"/>
+          <p:cNvPr id="50" name="TextBox 49"/>
           <p:cNvSpPr txBox="1"/>
           <p:nvPr/>
         </p:nvSpPr>
@@ -5116,7 +5163,7 @@
       </p:sp>
       <p:sp>
         <p:nvSpPr>
-          <p:cNvPr id="50" name="TextBox 49"/>
+          <p:cNvPr id="51" name="TextBox 50"/>
           <p:cNvSpPr txBox="1"/>
           <p:nvPr/>
         </p:nvSpPr>
@@ -5156,7 +5203,7 @@
       </p:sp>
       <p:sp>
         <p:nvSpPr>
-          <p:cNvPr id="51" name="TextBox 50"/>
+          <p:cNvPr id="52" name="TextBox 51"/>
           <p:cNvSpPr txBox="1"/>
           <p:nvPr/>
         </p:nvSpPr>
@@ -5191,14 +5238,14 @@
                 <a:latin typeface="Noto Sans TC"/>
                 <a:ea typeface="Noto Sans TC"/>
               </a:rPr>
-              <a:t>留白適中（頁邊 88px）· 每頁 ≤55 字</a:t>
-            </a:r>
-          </a:p>
-        </p:txBody>
-      </p:sp>
-      <p:sp>
-        <p:nvSpPr>
-          <p:cNvPr id="52" name="TextBox 51"/>
+              <a:t>留白適中（頁邊 88px）· 字級不縮，裝不下就拆頁</a:t>
+            </a:r>
+          </a:p>
+        </p:txBody>
+      </p:sp>
+      <p:sp>
+        <p:nvSpPr>
+          <p:cNvPr id="53" name="TextBox 52"/>
           <p:cNvSpPr txBox="1"/>
           <p:nvPr/>
         </p:nvSpPr>
@@ -5238,7 +5285,7 @@
       </p:sp>
       <p:sp>
         <p:nvSpPr>
-          <p:cNvPr id="53" name="TextBox 52"/>
+          <p:cNvPr id="54" name="TextBox 53"/>
           <p:cNvSpPr txBox="1"/>
           <p:nvPr/>
         </p:nvSpPr>
@@ -5278,7 +5325,7 @@
       </p:sp>
       <p:sp>
         <p:nvSpPr>
-          <p:cNvPr id="54" name="TextBox 53"/>
+          <p:cNvPr id="55" name="TextBox 54"/>
           <p:cNvSpPr txBox="1"/>
           <p:nvPr/>
         </p:nvSpPr>
@@ -5318,7 +5365,7 @@
       </p:sp>
       <p:sp>
         <p:nvSpPr>
-          <p:cNvPr id="55" name="TextBox 54"/>
+          <p:cNvPr id="56" name="TextBox 55"/>
           <p:cNvSpPr txBox="1"/>
           <p:nvPr/>
         </p:nvSpPr>
@@ -5358,7 +5405,7 @@
       </p:sp>
       <p:sp>
         <p:nvSpPr>
-          <p:cNvPr id="56" name="TextBox 55"/>
+          <p:cNvPr id="57" name="TextBox 56"/>
           <p:cNvSpPr txBox="1"/>
           <p:nvPr/>
         </p:nvSpPr>
@@ -5398,14 +5445,14 @@
       </p:sp>
       <p:sp>
         <p:nvSpPr>
-          <p:cNvPr id="57" name="TextBox 56"/>
+          <p:cNvPr id="58" name="TextBox 57"/>
           <p:cNvSpPr txBox="1"/>
           <p:nvPr/>
         </p:nvSpPr>
         <p:spPr>
           <a:xfrm>
             <a:off x="8232725" y="5029200"/>
-            <a:ext cx="923925" cy="314325"/>
+            <a:ext cx="676275" cy="314325"/>
           </a:xfrm>
           <a:prstGeom prst="rect">
             <a:avLst/>
@@ -5431,21 +5478,21 @@
                 <a:latin typeface="Noto Sans TC"/>
                 <a:ea typeface="Noto Sans TC"/>
               </a:rPr>
-              <a:t>一頁一數字</a:t>
-            </a:r>
-          </a:p>
-        </p:txBody>
-      </p:sp>
-      <p:sp>
-        <p:nvSpPr>
-          <p:cNvPr id="58" name="TextBox 57"/>
+              <a:t>長文頁</a:t>
+            </a:r>
+          </a:p>
+        </p:txBody>
+      </p:sp>
+      <p:sp>
+        <p:nvSpPr>
+          <p:cNvPr id="59" name="TextBox 58"/>
           <p:cNvSpPr txBox="1"/>
           <p:nvPr/>
         </p:nvSpPr>
         <p:spPr>
           <a:xfrm>
-            <a:off x="9175700" y="5029200"/>
-            <a:ext cx="676275" cy="314325"/>
+            <a:off x="8928050" y="5029200"/>
+            <a:ext cx="923925" cy="314325"/>
           </a:xfrm>
           <a:prstGeom prst="rect">
             <a:avLst/>
@@ -5471,21 +5518,21 @@
                 <a:latin typeface="Noto Sans TC"/>
                 <a:ea typeface="Noto Sans TC"/>
               </a:rPr>
-              <a:t>章節頁</a:t>
-            </a:r>
-          </a:p>
-        </p:txBody>
-      </p:sp>
-      <p:sp>
-        <p:nvSpPr>
-          <p:cNvPr id="59" name="TextBox 58"/>
+              <a:t>一頁一數字</a:t>
+            </a:r>
+          </a:p>
+        </p:txBody>
+      </p:sp>
+      <p:sp>
+        <p:nvSpPr>
+          <p:cNvPr id="60" name="TextBox 59"/>
           <p:cNvSpPr txBox="1"/>
           <p:nvPr/>
         </p:nvSpPr>
         <p:spPr>
           <a:xfrm>
             <a:off x="9871025" y="5029200"/>
-            <a:ext cx="800100" cy="314325"/>
+            <a:ext cx="676275" cy="314325"/>
           </a:xfrm>
           <a:prstGeom prst="rect">
             <a:avLst/>
@@ -5511,21 +5558,21 @@
                 <a:latin typeface="Noto Sans TC"/>
                 <a:ea typeface="Noto Sans TC"/>
               </a:rPr>
-              <a:t>步驟流程</a:t>
-            </a:r>
-          </a:p>
-        </p:txBody>
-      </p:sp>
-      <p:sp>
-        <p:nvSpPr>
-          <p:cNvPr id="60" name="TextBox 59"/>
+              <a:t>章節頁</a:t>
+            </a:r>
+          </a:p>
+        </p:txBody>
+      </p:sp>
+      <p:sp>
+        <p:nvSpPr>
+          <p:cNvPr id="61" name="TextBox 60"/>
           <p:cNvSpPr txBox="1"/>
           <p:nvPr/>
         </p:nvSpPr>
         <p:spPr>
           <a:xfrm>
             <a:off x="8232725" y="5381625"/>
-            <a:ext cx="552450" cy="314325"/>
+            <a:ext cx="800100" cy="314325"/>
           </a:xfrm>
           <a:prstGeom prst="rect">
             <a:avLst/>
@@ -5551,6 +5598,46 @@
                 <a:latin typeface="Noto Sans TC"/>
                 <a:ea typeface="Noto Sans TC"/>
               </a:rPr>
+              <a:t>步驟流程</a:t>
+            </a:r>
+          </a:p>
+        </p:txBody>
+      </p:sp>
+      <p:sp>
+        <p:nvSpPr>
+          <p:cNvPr id="62" name="TextBox 61"/>
+          <p:cNvSpPr txBox="1"/>
+          <p:nvPr/>
+        </p:nvSpPr>
+        <p:spPr>
+          <a:xfrm>
+            <a:off x="9051875" y="5381625"/>
+            <a:ext cx="552450" cy="314325"/>
+          </a:xfrm>
+          <a:prstGeom prst="rect">
+            <a:avLst/>
+          </a:prstGeom>
+          <a:noFill/>
+        </p:spPr>
+        <p:txBody>
+          <a:bodyPr wrap="square" lIns="0" rIns="0" tIns="0" bIns="0" anchor="t">
+            <a:spAutoFit/>
+          </a:bodyPr>
+          <a:lstStyle/>
+          <a:p>
+            <a:pPr algn="l">
+              <a:lnSpc>
+                <a:spcPts val="2175"/>
+              </a:lnSpc>
+            </a:pPr>
+            <a:r>
+              <a:rPr sz="975" b="0">
+                <a:solidFill>
+                  <a:srgbClr val="3B2A20"/>
+                </a:solidFill>
+                <a:latin typeface="Noto Sans TC"/>
+                <a:ea typeface="Noto Sans TC"/>
+              </a:rPr>
               <a:t>封底</a:t>
             </a:r>
           </a:p>
@@ -5558,7 +5645,7 @@
       </p:sp>
       <p:sp>
         <p:nvSpPr>
-          <p:cNvPr id="61" name="TextBox 60"/>
+          <p:cNvPr id="63" name="TextBox 62"/>
           <p:cNvSpPr txBox="1"/>
           <p:nvPr/>
         </p:nvSpPr>
@@ -5592,6 +5679,208 @@
                 <a:ea typeface="Noto Sans TC"/>
               </a:rPr>
               <a:t>01</a:t>
+            </a:r>
+          </a:p>
+        </p:txBody>
+      </p:sp>
+    </p:spTree>
+  </p:cSld>
+  <p:clrMapOvr>
+    <a:masterClrMapping/>
+  </p:clrMapOvr>
+</p:sld>
+</file>
+
+<file path=ppt/slides/slide10.xml><?xml version="1.0" encoding="utf-8"?>
+<p:sld xmlns:a="http://schemas.openxmlformats.org/drawingml/2006/main" xmlns:p="http://schemas.openxmlformats.org/presentationml/2006/main" xmlns:r="http://schemas.openxmlformats.org/officeDocument/2006/relationships">
+  <p:cSld>
+    <p:spTree>
+      <p:nvGrpSpPr>
+        <p:cNvPr id="1" name=""/>
+        <p:cNvGrpSpPr/>
+        <p:nvPr/>
+      </p:nvGrpSpPr>
+      <p:grpSpPr/>
+      <p:pic>
+        <p:nvPicPr>
+          <p:cNvPr id="2" name="Picture 1" descr="vivid-4-bake.jpg"/>
+          <p:cNvPicPr>
+            <a:picLocks noChangeAspect="1"/>
+          </p:cNvPicPr>
+          <p:nvPr/>
+        </p:nvPicPr>
+        <p:blipFill>
+          <a:blip r:embed="rId2"/>
+          <a:stretch>
+            <a:fillRect/>
+          </a:stretch>
+        </p:blipFill>
+        <p:spPr>
+          <a:xfrm>
+            <a:off x="0" y="0"/>
+            <a:ext cx="12192000" cy="6858000"/>
+          </a:xfrm>
+          <a:prstGeom prst="rect">
+            <a:avLst/>
+          </a:prstGeom>
+        </p:spPr>
+      </p:pic>
+      <p:sp>
+        <p:nvSpPr>
+          <p:cNvPr id="3" name="TextBox 2"/>
+          <p:cNvSpPr txBox="1"/>
+          <p:nvPr/>
+        </p:nvSpPr>
+        <p:spPr>
+          <a:xfrm>
+            <a:off x="10462170" y="457200"/>
+            <a:ext cx="948779" cy="228600"/>
+          </a:xfrm>
+          <a:prstGeom prst="rect">
+            <a:avLst/>
+          </a:prstGeom>
+          <a:noFill/>
+        </p:spPr>
+        <p:txBody>
+          <a:bodyPr wrap="square" lIns="0" rIns="0" tIns="0" bIns="0" anchor="t">
+            <a:spAutoFit/>
+          </a:bodyPr>
+          <a:lstStyle/>
+          <a:p>
+            <a:pPr algn="l">
+              <a:lnSpc>
+                <a:spcPts val="1500"/>
+              </a:lnSpc>
+            </a:pPr>
+            <a:r>
+              <a:rPr sz="1350" b="0" spc="405">
+                <a:solidFill>
+                  <a:srgbClr val="3B2A20"/>
+                </a:solidFill>
+                <a:latin typeface="Huninn"/>
+                <a:ea typeface="Huninn"/>
+              </a:rPr>
+              <a:t>跳跳市集</a:t>
+            </a:r>
+          </a:p>
+        </p:txBody>
+      </p:sp>
+      <p:sp>
+        <p:nvSpPr>
+          <p:cNvPr id="4" name="TextBox 3"/>
+          <p:cNvSpPr txBox="1"/>
+          <p:nvPr/>
+        </p:nvSpPr>
+        <p:spPr>
+          <a:xfrm>
+            <a:off x="838200" y="2850802"/>
+            <a:ext cx="10572750" cy="533400"/>
+          </a:xfrm>
+          <a:prstGeom prst="rect">
+            <a:avLst/>
+          </a:prstGeom>
+          <a:noFill/>
+        </p:spPr>
+        <p:txBody>
+          <a:bodyPr wrap="square" lIns="0" rIns="0" tIns="0" bIns="0" anchor="t">
+            <a:spAutoFit/>
+          </a:bodyPr>
+          <a:lstStyle/>
+          <a:p>
+            <a:pPr algn="l">
+              <a:lnSpc>
+                <a:spcPts val="3900"/>
+              </a:lnSpc>
+            </a:pPr>
+            <a:r>
+              <a:rPr sz="3000" b="0">
+                <a:solidFill>
+                  <a:srgbClr val="3B2A20"/>
+                </a:solidFill>
+                <a:latin typeface="Huninn"/>
+                <a:ea typeface="Huninn"/>
+              </a:rPr>
+              <a:t>下個週六，街口見。</a:t>
+            </a:r>
+          </a:p>
+        </p:txBody>
+      </p:sp>
+      <p:sp>
+        <p:nvSpPr>
+          <p:cNvPr id="5" name="TextBox 4"/>
+          <p:cNvSpPr txBox="1"/>
+          <p:nvPr/>
+        </p:nvSpPr>
+        <p:spPr>
+          <a:xfrm>
+            <a:off x="838200" y="3650902"/>
+            <a:ext cx="10572750" cy="394245"/>
+          </a:xfrm>
+          <a:prstGeom prst="rect">
+            <a:avLst/>
+          </a:prstGeom>
+          <a:noFill/>
+        </p:spPr>
+        <p:txBody>
+          <a:bodyPr wrap="square" lIns="0" rIns="0" tIns="0" bIns="0" anchor="t">
+            <a:spAutoFit/>
+          </a:bodyPr>
+          <a:lstStyle/>
+          <a:p>
+            <a:pPr algn="l">
+              <a:lnSpc>
+                <a:spcPts val="2804"/>
+              </a:lnSpc>
+            </a:pPr>
+            <a:r>
+              <a:rPr sz="1650" b="0">
+                <a:solidFill>
+                  <a:srgbClr val="3B2A20"/>
+                </a:solidFill>
+                <a:latin typeface="Noto Sans TC"/>
+                <a:ea typeface="Noto Sans TC"/>
+              </a:rPr>
+              <a:t>hop@market.example（示意，換成你的）</a:t>
+            </a:r>
+          </a:p>
+        </p:txBody>
+      </p:sp>
+      <p:sp>
+        <p:nvSpPr>
+          <p:cNvPr id="6" name="TextBox 5"/>
+          <p:cNvSpPr txBox="1"/>
+          <p:nvPr/>
+        </p:nvSpPr>
+        <p:spPr>
+          <a:xfrm>
+            <a:off x="11205567" y="6362700"/>
+            <a:ext cx="205382" cy="228600"/>
+          </a:xfrm>
+          <a:prstGeom prst="rect">
+            <a:avLst/>
+          </a:prstGeom>
+          <a:noFill/>
+        </p:spPr>
+        <p:txBody>
+          <a:bodyPr wrap="square" lIns="0" rIns="0" tIns="0" bIns="0" anchor="t">
+            <a:spAutoFit/>
+          </a:bodyPr>
+          <a:lstStyle/>
+          <a:p>
+            <a:pPr algn="l">
+              <a:lnSpc>
+                <a:spcPts val="1500"/>
+              </a:lnSpc>
+            </a:pPr>
+            <a:r>
+              <a:rPr sz="1050" b="0">
+                <a:solidFill>
+                  <a:srgbClr val="3B2A20"/>
+                </a:solidFill>
+                <a:latin typeface="Noto Sans TC"/>
+                <a:ea typeface="Noto Sans TC"/>
+              </a:rPr>
+              <a:t>10</a:t>
             </a:r>
           </a:p>
         </p:txBody>
@@ -6725,7 +7014,7 @@
       <p:grpSpPr/>
       <p:pic>
         <p:nvPicPr>
-          <p:cNvPr id="2" name="Picture 1" descr="vivid-1-bake.jpg"/>
+          <p:cNvPr id="2" name="Picture 1" descr="vivid-4-bake.jpg"/>
           <p:cNvPicPr>
             <a:picLocks noChangeAspect="1"/>
           </p:cNvPicPr>
@@ -7091,7 +7380,7 @@
       <p:grpSpPr/>
       <p:pic>
         <p:nvPicPr>
-          <p:cNvPr id="2" name="Picture 1" descr="vivid-1-bake.jpg"/>
+          <p:cNvPr id="2" name="Picture 1" descr="vivid-4-bake.jpg"/>
           <p:cNvPicPr>
             <a:picLocks noChangeAspect="1"/>
           </p:cNvPicPr>
@@ -7161,8 +7450,8 @@
         </p:nvSpPr>
         <p:spPr>
           <a:xfrm>
-            <a:off x="838200" y="1956494"/>
-            <a:ext cx="10572750" cy="1943100"/>
+            <a:off x="838200" y="838200"/>
+            <a:ext cx="10572750" cy="533400"/>
           </a:xfrm>
           <a:prstGeom prst="rect">
             <a:avLst/>
@@ -7177,18 +7466,18 @@
           <a:p>
             <a:pPr algn="l">
               <a:lnSpc>
-                <a:spcPts val="15000"/>
+                <a:spcPts val="3900"/>
               </a:lnSpc>
             </a:pPr>
             <a:r>
-              <a:rPr sz="15000" b="0">
-                <a:solidFill>
-                  <a:srgbClr val="9DC183"/>
+              <a:rPr sz="3000" b="0">
+                <a:solidFill>
+                  <a:srgbClr val="3B2A20"/>
                 </a:solidFill>
                 <a:latin typeface="Huninn"/>
                 <a:ea typeface="Huninn"/>
               </a:rPr>
-              <a:t>6,000 人</a:t>
+              <a:t>內文多的時候</a:t>
             </a:r>
           </a:p>
         </p:txBody>
@@ -7201,8 +7490,8 @@
         </p:nvSpPr>
         <p:spPr>
           <a:xfrm>
-            <a:off x="838200" y="4090094"/>
-            <a:ext cx="6153150" cy="394245"/>
+            <a:off x="838200" y="2109192"/>
+            <a:ext cx="9963150" cy="750391"/>
           </a:xfrm>
           <a:prstGeom prst="rect">
             <a:avLst/>
@@ -7228,7 +7517,7 @@
                 <a:latin typeface="Noto Sans TC"/>
                 <a:ea typeface="Noto Sans TC"/>
               </a:rPr>
-              <a:t>上一場市集的來客數。</a:t>
+              <a:t>這一頁是假字，用來示範內文很多的時候版面長什麼樣。字級還是 22，行距照大腦的設定，段落一段接一段往下排，不因為字多就把字縮小，也不把留白吃掉。</a:t>
             </a:r>
           </a:p>
         </p:txBody>
@@ -7241,8 +7530,8 @@
         </p:nvSpPr>
         <p:spPr>
           <a:xfrm>
-            <a:off x="838200" y="4674840"/>
-            <a:ext cx="6153150" cy="264765"/>
+            <a:off x="838200" y="2992933"/>
+            <a:ext cx="9963150" cy="750391"/>
           </a:xfrm>
           <a:prstGeom prst="rect">
             <a:avLst/>
@@ -7257,20 +7546,18 @@
           <a:p>
             <a:pPr algn="l">
               <a:lnSpc>
-                <a:spcPts val="1785"/>
+                <a:spcPts val="2804"/>
               </a:lnSpc>
             </a:pPr>
             <a:r>
-              <a:rPr sz="1050" b="0">
-                <a:solidFill>
-                  <a:srgbClr val="3B2A20">
-                    <a:alpha val="85000"/>
-                  </a:srgbClr>
+              <a:rPr sz="1650" b="0">
+                <a:solidFill>
+                  <a:srgbClr val="3B2A20"/>
                 </a:solidFill>
                 <a:latin typeface="Noto Sans TC"/>
                 <a:ea typeface="Noto Sans TC"/>
               </a:rPr>
-              <a:t>示意數字，換成你的。</a:t>
+              <a:t>假字假字，這裡通常會放一段背景說明：為什麼要做這件事、之前試過什麼、現在卡在哪裡。寫的時候一段只講一個重點，讀的人才跟得上，講的人也不會念到一半迷路。</a:t>
             </a:r>
           </a:p>
         </p:txBody>
@@ -7278,6 +7565,86 @@
       <p:sp>
         <p:nvSpPr>
           <p:cNvPr id="7" name="TextBox 6"/>
+          <p:cNvSpPr txBox="1"/>
+          <p:nvPr/>
+        </p:nvSpPr>
+        <p:spPr>
+          <a:xfrm>
+            <a:off x="838200" y="3876675"/>
+            <a:ext cx="9963150" cy="750391"/>
+          </a:xfrm>
+          <a:prstGeom prst="rect">
+            <a:avLst/>
+          </a:prstGeom>
+          <a:noFill/>
+        </p:spPr>
+        <p:txBody>
+          <a:bodyPr wrap="square" lIns="0" rIns="0" tIns="0" bIns="0" anchor="t">
+            <a:spAutoFit/>
+          </a:bodyPr>
+          <a:lstStyle/>
+          <a:p>
+            <a:pPr algn="l">
+              <a:lnSpc>
+                <a:spcPts val="2804"/>
+              </a:lnSpc>
+            </a:pPr>
+            <a:r>
+              <a:rPr sz="1650" b="0">
+                <a:solidFill>
+                  <a:srgbClr val="3B2A20"/>
+                </a:solidFill>
+                <a:latin typeface="Noto Sans TC"/>
+                <a:ea typeface="Noto Sans TC"/>
+              </a:rPr>
+              <a:t>內文到這個量大概就是一頁的上限。再多就拆成兩頁，或改用三欄重點、步驟流程把重點並列；不要縮字硬塞，也不要把行距壓扁，那樣看起來就不像同一份簡報了。</a:t>
+            </a:r>
+          </a:p>
+        </p:txBody>
+      </p:sp>
+      <p:sp>
+        <p:nvSpPr>
+          <p:cNvPr id="8" name="TextBox 7"/>
+          <p:cNvSpPr txBox="1"/>
+          <p:nvPr/>
+        </p:nvSpPr>
+        <p:spPr>
+          <a:xfrm>
+            <a:off x="838200" y="4760416"/>
+            <a:ext cx="9963150" cy="750391"/>
+          </a:xfrm>
+          <a:prstGeom prst="rect">
+            <a:avLst/>
+          </a:prstGeom>
+          <a:noFill/>
+        </p:spPr>
+        <p:txBody>
+          <a:bodyPr wrap="square" lIns="0" rIns="0" tIns="0" bIns="0" anchor="t">
+            <a:spAutoFit/>
+          </a:bodyPr>
+          <a:lstStyle/>
+          <a:p>
+            <a:pPr algn="l">
+              <a:lnSpc>
+                <a:spcPts val="2804"/>
+              </a:lnSpc>
+            </a:pPr>
+            <a:r>
+              <a:rPr sz="1650" b="0">
+                <a:solidFill>
+                  <a:srgbClr val="3B2A20"/>
+                </a:solidFill>
+                <a:latin typeface="Noto Sans TC"/>
+                <a:ea typeface="Noto Sans TC"/>
+              </a:rPr>
+              <a:t>最後一段留給補充：數字要有出處、名詞前後一致、日期用絕對值。這些寫在大腦的禁區裡，AI 排版時會照做，你交件前只要對一次就好。</a:t>
+            </a:r>
+          </a:p>
+        </p:txBody>
+      </p:sp>
+      <p:sp>
+        <p:nvSpPr>
+          <p:cNvPr id="9" name="TextBox 8"/>
           <p:cNvSpPr txBox="1"/>
           <p:nvPr/>
         </p:nvSpPr>
@@ -7335,7 +7702,7 @@
       <p:grpSpPr/>
       <p:pic>
         <p:nvPicPr>
-          <p:cNvPr id="2" name="Picture 1" descr="vivid-3-bake.jpg"/>
+          <p:cNvPr id="2" name="Picture 1" descr="vivid-4-bake.jpg"/>
           <p:cNvPicPr>
             <a:picLocks noChangeAspect="1"/>
           </p:cNvPicPr>
@@ -7405,8 +7772,8 @@
         </p:nvSpPr>
         <p:spPr>
           <a:xfrm>
-            <a:off x="838200" y="2472630"/>
-            <a:ext cx="10572750" cy="1181100"/>
+            <a:off x="838200" y="1956494"/>
+            <a:ext cx="10572750" cy="1943100"/>
           </a:xfrm>
           <a:prstGeom prst="rect">
             <a:avLst/>
@@ -7421,20 +7788,18 @@
           <a:p>
             <a:pPr algn="l">
               <a:lnSpc>
-                <a:spcPts val="9000"/>
+                <a:spcPts val="15000"/>
               </a:lnSpc>
             </a:pPr>
             <a:r>
-              <a:rPr sz="9000" b="0">
-                <a:solidFill>
-                  <a:srgbClr val="3B2A20">
-                    <a:alpha val="35000"/>
-                  </a:srgbClr>
+              <a:rPr sz="15000" b="0">
+                <a:solidFill>
+                  <a:srgbClr val="9DC183"/>
                 </a:solidFill>
                 <a:latin typeface="Huninn"/>
                 <a:ea typeface="Huninn"/>
               </a:rPr>
-              <a:t>02</a:t>
+              <a:t>6,000 人</a:t>
             </a:r>
           </a:p>
         </p:txBody>
@@ -7447,8 +7812,8 @@
         </p:nvSpPr>
         <p:spPr>
           <a:xfrm>
-            <a:off x="838200" y="3691830"/>
-            <a:ext cx="10572750" cy="731490"/>
+            <a:off x="838200" y="4090094"/>
+            <a:ext cx="6153150" cy="394245"/>
           </a:xfrm>
           <a:prstGeom prst="rect">
             <a:avLst/>
@@ -7463,18 +7828,18 @@
           <a:p>
             <a:pPr algn="l">
               <a:lnSpc>
-                <a:spcPts val="5459"/>
+                <a:spcPts val="2804"/>
               </a:lnSpc>
             </a:pPr>
             <a:r>
-              <a:rPr sz="4200" b="0">
+              <a:rPr sz="1650" b="0">
                 <a:solidFill>
                   <a:srgbClr val="3B2A20"/>
                 </a:solidFill>
-                <a:latin typeface="Huninn"/>
-                <a:ea typeface="Huninn"/>
+                <a:latin typeface="Noto Sans TC"/>
+                <a:ea typeface="Noto Sans TC"/>
               </a:rPr>
-              <a:t>報名</a:t>
+              <a:t>上一場市集的來客數。</a:t>
             </a:r>
           </a:p>
         </p:txBody>
@@ -7482,6 +7847,48 @@
       <p:sp>
         <p:nvSpPr>
           <p:cNvPr id="6" name="TextBox 5"/>
+          <p:cNvSpPr txBox="1"/>
+          <p:nvPr/>
+        </p:nvSpPr>
+        <p:spPr>
+          <a:xfrm>
+            <a:off x="838200" y="4674840"/>
+            <a:ext cx="6153150" cy="264765"/>
+          </a:xfrm>
+          <a:prstGeom prst="rect">
+            <a:avLst/>
+          </a:prstGeom>
+          <a:noFill/>
+        </p:spPr>
+        <p:txBody>
+          <a:bodyPr wrap="square" lIns="0" rIns="0" tIns="0" bIns="0" anchor="t">
+            <a:spAutoFit/>
+          </a:bodyPr>
+          <a:lstStyle/>
+          <a:p>
+            <a:pPr algn="l">
+              <a:lnSpc>
+                <a:spcPts val="1785"/>
+              </a:lnSpc>
+            </a:pPr>
+            <a:r>
+              <a:rPr sz="1050" b="0">
+                <a:solidFill>
+                  <a:srgbClr val="3B2A20">
+                    <a:alpha val="85000"/>
+                  </a:srgbClr>
+                </a:solidFill>
+                <a:latin typeface="Noto Sans TC"/>
+                <a:ea typeface="Noto Sans TC"/>
+              </a:rPr>
+              <a:t>示意數字，換成你的。</a:t>
+            </a:r>
+          </a:p>
+        </p:txBody>
+      </p:sp>
+      <p:sp>
+        <p:nvSpPr>
+          <p:cNvPr id="7" name="TextBox 6"/>
           <p:cNvSpPr txBox="1"/>
           <p:nvPr/>
         </p:nvSpPr>
@@ -7539,7 +7946,7 @@
       <p:grpSpPr/>
       <p:pic>
         <p:nvPicPr>
-          <p:cNvPr id="2" name="Picture 1" descr="vivid-1-bake.jpg"/>
+          <p:cNvPr id="2" name="Picture 1" descr="vivid-3-bake.jpg"/>
           <p:cNvPicPr>
             <a:picLocks noChangeAspect="1"/>
           </p:cNvPicPr>
@@ -7563,139 +7970,7 @@
       </p:pic>
       <p:sp>
         <p:nvSpPr>
-          <p:cNvPr id="3" name="Rounded Rectangle 2"/>
-          <p:cNvSpPr/>
-          <p:nvPr/>
-        </p:nvSpPr>
-        <p:spPr>
-          <a:xfrm>
-            <a:off x="838200" y="2907952"/>
-            <a:ext cx="3251150" cy="1765845"/>
-          </a:xfrm>
-          <a:prstGeom prst="roundRect">
-            <a:avLst>
-              <a:gd name="adj" fmla="val 15103"/>
-            </a:avLst>
-          </a:prstGeom>
-          <a:solidFill>
-            <a:srgbClr val="F9C6C0"/>
-          </a:solidFill>
-          <a:ln>
-            <a:noFill/>
-          </a:ln>
-          <a:effectLst/>
-        </p:spPr>
-        <p:style>
-          <a:lnRef idx="1">
-            <a:schemeClr val="accent1"/>
-          </a:lnRef>
-          <a:fillRef idx="3">
-            <a:schemeClr val="accent1"/>
-          </a:fillRef>
-          <a:effectRef idx="2">
-            <a:schemeClr val="accent1"/>
-          </a:effectRef>
-          <a:fontRef idx="minor">
-            <a:schemeClr val="lt1"/>
-          </a:fontRef>
-        </p:style>
-        <p:txBody>
-          <a:bodyPr rtlCol="0" anchor="ctr"/>
-          <a:lstStyle/>
-          <a:p/>
-        </p:txBody>
-      </p:sp>
-      <p:sp>
-        <p:nvSpPr>
-          <p:cNvPr id="4" name="Rounded Rectangle 3"/>
-          <p:cNvSpPr/>
-          <p:nvPr/>
-        </p:nvSpPr>
-        <p:spPr>
-          <a:xfrm>
-            <a:off x="4470350" y="2907952"/>
-            <a:ext cx="3251150" cy="1765845"/>
-          </a:xfrm>
-          <a:prstGeom prst="roundRect">
-            <a:avLst>
-              <a:gd name="adj" fmla="val 15103"/>
-            </a:avLst>
-          </a:prstGeom>
-          <a:solidFill>
-            <a:srgbClr val="F6E27A"/>
-          </a:solidFill>
-          <a:ln>
-            <a:noFill/>
-          </a:ln>
-          <a:effectLst/>
-        </p:spPr>
-        <p:style>
-          <a:lnRef idx="1">
-            <a:schemeClr val="accent1"/>
-          </a:lnRef>
-          <a:fillRef idx="3">
-            <a:schemeClr val="accent1"/>
-          </a:fillRef>
-          <a:effectRef idx="2">
-            <a:schemeClr val="accent1"/>
-          </a:effectRef>
-          <a:fontRef idx="minor">
-            <a:schemeClr val="lt1"/>
-          </a:fontRef>
-        </p:style>
-        <p:txBody>
-          <a:bodyPr rtlCol="0" anchor="ctr"/>
-          <a:lstStyle/>
-          <a:p/>
-        </p:txBody>
-      </p:sp>
-      <p:sp>
-        <p:nvSpPr>
-          <p:cNvPr id="5" name="Rounded Rectangle 4"/>
-          <p:cNvSpPr/>
-          <p:nvPr/>
-        </p:nvSpPr>
-        <p:spPr>
-          <a:xfrm>
-            <a:off x="8102500" y="2907952"/>
-            <a:ext cx="3251299" cy="1765845"/>
-          </a:xfrm>
-          <a:prstGeom prst="roundRect">
-            <a:avLst>
-              <a:gd name="adj" fmla="val 15103"/>
-            </a:avLst>
-          </a:prstGeom>
-          <a:solidFill>
-            <a:srgbClr val="B9CDEB"/>
-          </a:solidFill>
-          <a:ln>
-            <a:noFill/>
-          </a:ln>
-          <a:effectLst/>
-        </p:spPr>
-        <p:style>
-          <a:lnRef idx="1">
-            <a:schemeClr val="accent1"/>
-          </a:lnRef>
-          <a:fillRef idx="3">
-            <a:schemeClr val="accent1"/>
-          </a:fillRef>
-          <a:effectRef idx="2">
-            <a:schemeClr val="accent1"/>
-          </a:effectRef>
-          <a:fontRef idx="minor">
-            <a:schemeClr val="lt1"/>
-          </a:fontRef>
-        </p:style>
-        <p:txBody>
-          <a:bodyPr rtlCol="0" anchor="ctr"/>
-          <a:lstStyle/>
-          <a:p/>
-        </p:txBody>
-      </p:sp>
-      <p:sp>
-        <p:nvSpPr>
-          <p:cNvPr id="6" name="TextBox 5"/>
+          <p:cNvPr id="3" name="TextBox 2"/>
           <p:cNvSpPr txBox="1"/>
           <p:nvPr/>
         </p:nvSpPr>
@@ -7735,14 +8010,14 @@
       </p:sp>
       <p:sp>
         <p:nvSpPr>
-          <p:cNvPr id="7" name="TextBox 6"/>
+          <p:cNvPr id="4" name="TextBox 3"/>
           <p:cNvSpPr txBox="1"/>
           <p:nvPr/>
         </p:nvSpPr>
         <p:spPr>
           <a:xfrm>
-            <a:off x="838200" y="838200"/>
-            <a:ext cx="10572750" cy="533400"/>
+            <a:off x="838200" y="2472630"/>
+            <a:ext cx="10572750" cy="1181100"/>
           </a:xfrm>
           <a:prstGeom prst="rect">
             <a:avLst/>
@@ -7757,173 +8032,15 @@
           <a:p>
             <a:pPr algn="l">
               <a:lnSpc>
-                <a:spcPts val="3900"/>
+                <a:spcPts val="9000"/>
               </a:lnSpc>
             </a:pPr>
             <a:r>
-              <a:rPr sz="3000" b="0">
-                <a:solidFill>
-                  <a:srgbClr val="3B2A20"/>
-                </a:solidFill>
-                <a:latin typeface="Huninn"/>
-                <a:ea typeface="Huninn"/>
-              </a:rPr>
-              <a:t>三步開始</a:t>
-            </a:r>
-          </a:p>
-        </p:txBody>
-      </p:sp>
-      <p:sp>
-        <p:nvSpPr>
-          <p:cNvPr id="8" name="TextBox 7"/>
-          <p:cNvSpPr txBox="1"/>
-          <p:nvPr/>
-        </p:nvSpPr>
-        <p:spPr>
-          <a:xfrm>
-            <a:off x="1143000" y="3174652"/>
-            <a:ext cx="2698700" cy="419100"/>
-          </a:xfrm>
-          <a:prstGeom prst="rect">
-            <a:avLst/>
-          </a:prstGeom>
-          <a:noFill/>
-        </p:spPr>
-        <p:txBody>
-          <a:bodyPr wrap="square" lIns="0" rIns="0" tIns="0" bIns="0" anchor="t">
-            <a:spAutoFit/>
-          </a:bodyPr>
-          <a:lstStyle/>
-          <a:p>
-            <a:pPr algn="l">
-              <a:lnSpc>
-                <a:spcPts val="3000"/>
-              </a:lnSpc>
-            </a:pPr>
-            <a:r>
-              <a:rPr sz="3000" b="0">
-                <a:solidFill>
-                  <a:srgbClr val="9DC183"/>
-                </a:solidFill>
-                <a:latin typeface="Huninn"/>
-                <a:ea typeface="Huninn"/>
-              </a:rPr>
-              <a:t>01</a:t>
-            </a:r>
-          </a:p>
-        </p:txBody>
-      </p:sp>
-      <p:sp>
-        <p:nvSpPr>
-          <p:cNvPr id="9" name="TextBox 8"/>
-          <p:cNvSpPr txBox="1"/>
-          <p:nvPr/>
-        </p:nvSpPr>
-        <p:spPr>
-          <a:xfrm>
-            <a:off x="1143000" y="3689002"/>
-            <a:ext cx="2698700" cy="342900"/>
-          </a:xfrm>
-          <a:prstGeom prst="rect">
-            <a:avLst/>
-          </a:prstGeom>
-          <a:noFill/>
-        </p:spPr>
-        <p:txBody>
-          <a:bodyPr wrap="square" lIns="0" rIns="0" tIns="0" bIns="0" anchor="t">
-            <a:spAutoFit/>
-          </a:bodyPr>
-          <a:lstStyle/>
-          <a:p>
-            <a:pPr algn="l">
-              <a:lnSpc>
-                <a:spcPts val="2400"/>
-              </a:lnSpc>
-            </a:pPr>
-            <a:r>
-              <a:rPr sz="1650" b="0">
-                <a:solidFill>
-                  <a:srgbClr val="3B2A20"/>
-                </a:solidFill>
-                <a:latin typeface="Noto Sans TC"/>
-                <a:ea typeface="Noto Sans TC"/>
-              </a:rPr>
-              <a:t>填表</a:t>
-            </a:r>
-          </a:p>
-        </p:txBody>
-      </p:sp>
-      <p:sp>
-        <p:nvSpPr>
-          <p:cNvPr id="10" name="TextBox 9"/>
-          <p:cNvSpPr txBox="1"/>
-          <p:nvPr/>
-        </p:nvSpPr>
-        <p:spPr>
-          <a:xfrm>
-            <a:off x="1143000" y="4050952"/>
-            <a:ext cx="2698700" cy="394245"/>
-          </a:xfrm>
-          <a:prstGeom prst="rect">
-            <a:avLst/>
-          </a:prstGeom>
-          <a:noFill/>
-        </p:spPr>
-        <p:txBody>
-          <a:bodyPr wrap="square" lIns="0" rIns="0" tIns="0" bIns="0" anchor="t">
-            <a:spAutoFit/>
-          </a:bodyPr>
-          <a:lstStyle/>
-          <a:p>
-            <a:pPr algn="l">
-              <a:lnSpc>
-                <a:spcPts val="2804"/>
-              </a:lnSpc>
-            </a:pPr>
-            <a:r>
-              <a:rPr sz="1650" b="0">
-                <a:solidFill>
-                  <a:srgbClr val="3B2A20"/>
-                </a:solidFill>
-                <a:latin typeface="Noto Sans TC"/>
-                <a:ea typeface="Noto Sans TC"/>
-              </a:rPr>
-              <a:t>三分鐘，寫你賣什麼。</a:t>
-            </a:r>
-          </a:p>
-        </p:txBody>
-      </p:sp>
-      <p:sp>
-        <p:nvSpPr>
-          <p:cNvPr id="11" name="TextBox 10"/>
-          <p:cNvSpPr txBox="1"/>
-          <p:nvPr/>
-        </p:nvSpPr>
-        <p:spPr>
-          <a:xfrm>
-            <a:off x="4775150" y="3174652"/>
-            <a:ext cx="2698700" cy="419100"/>
-          </a:xfrm>
-          <a:prstGeom prst="rect">
-            <a:avLst/>
-          </a:prstGeom>
-          <a:noFill/>
-        </p:spPr>
-        <p:txBody>
-          <a:bodyPr wrap="square" lIns="0" rIns="0" tIns="0" bIns="0" anchor="t">
-            <a:spAutoFit/>
-          </a:bodyPr>
-          <a:lstStyle/>
-          <a:p>
-            <a:pPr algn="l">
-              <a:lnSpc>
-                <a:spcPts val="3000"/>
-              </a:lnSpc>
-            </a:pPr>
-            <a:r>
-              <a:rPr sz="3000" b="0">
-                <a:solidFill>
-                  <a:srgbClr val="9DC183"/>
+              <a:rPr sz="9000" b="0">
+                <a:solidFill>
+                  <a:srgbClr val="3B2A20">
+                    <a:alpha val="35000"/>
+                  </a:srgbClr>
                 </a:solidFill>
                 <a:latin typeface="Huninn"/>
                 <a:ea typeface="Huninn"/>
@@ -7935,14 +8052,14 @@
       </p:sp>
       <p:sp>
         <p:nvSpPr>
-          <p:cNvPr id="12" name="TextBox 11"/>
+          <p:cNvPr id="5" name="TextBox 4"/>
           <p:cNvSpPr txBox="1"/>
           <p:nvPr/>
         </p:nvSpPr>
         <p:spPr>
           <a:xfrm>
-            <a:off x="4775150" y="3689002"/>
-            <a:ext cx="2698700" cy="342900"/>
+            <a:off x="838200" y="3691830"/>
+            <a:ext cx="10572750" cy="731490"/>
           </a:xfrm>
           <a:prstGeom prst="rect">
             <a:avLst/>
@@ -7957,185 +8074,25 @@
           <a:p>
             <a:pPr algn="l">
               <a:lnSpc>
-                <a:spcPts val="2400"/>
+                <a:spcPts val="5459"/>
               </a:lnSpc>
             </a:pPr>
             <a:r>
-              <a:rPr sz="1650" b="0">
+              <a:rPr sz="4200" b="0">
                 <a:solidFill>
                   <a:srgbClr val="3B2A20"/>
-                </a:solidFill>
-                <a:latin typeface="Noto Sans TC"/>
-                <a:ea typeface="Noto Sans TC"/>
-              </a:rPr>
-              <a:t>審核</a:t>
-            </a:r>
-          </a:p>
-        </p:txBody>
-      </p:sp>
-      <p:sp>
-        <p:nvSpPr>
-          <p:cNvPr id="13" name="TextBox 12"/>
-          <p:cNvSpPr txBox="1"/>
-          <p:nvPr/>
-        </p:nvSpPr>
-        <p:spPr>
-          <a:xfrm>
-            <a:off x="4775150" y="4050952"/>
-            <a:ext cx="2698700" cy="394245"/>
-          </a:xfrm>
-          <a:prstGeom prst="rect">
-            <a:avLst/>
-          </a:prstGeom>
-          <a:noFill/>
-        </p:spPr>
-        <p:txBody>
-          <a:bodyPr wrap="square" lIns="0" rIns="0" tIns="0" bIns="0" anchor="t">
-            <a:spAutoFit/>
-          </a:bodyPr>
-          <a:lstStyle/>
-          <a:p>
-            <a:pPr algn="l">
-              <a:lnSpc>
-                <a:spcPts val="2804"/>
-              </a:lnSpc>
-            </a:pPr>
-            <a:r>
-              <a:rPr sz="1650" b="0">
-                <a:solidFill>
-                  <a:srgbClr val="3B2A20"/>
-                </a:solidFill>
-                <a:latin typeface="Noto Sans TC"/>
-                <a:ea typeface="Noto Sans TC"/>
-              </a:rPr>
-              <a:t>一週內回覆。</a:t>
-            </a:r>
-          </a:p>
-        </p:txBody>
-      </p:sp>
-      <p:sp>
-        <p:nvSpPr>
-          <p:cNvPr id="14" name="TextBox 13"/>
-          <p:cNvSpPr txBox="1"/>
-          <p:nvPr/>
-        </p:nvSpPr>
-        <p:spPr>
-          <a:xfrm>
-            <a:off x="8407300" y="3174652"/>
-            <a:ext cx="2698849" cy="419100"/>
-          </a:xfrm>
-          <a:prstGeom prst="rect">
-            <a:avLst/>
-          </a:prstGeom>
-          <a:noFill/>
-        </p:spPr>
-        <p:txBody>
-          <a:bodyPr wrap="square" lIns="0" rIns="0" tIns="0" bIns="0" anchor="t">
-            <a:spAutoFit/>
-          </a:bodyPr>
-          <a:lstStyle/>
-          <a:p>
-            <a:pPr algn="l">
-              <a:lnSpc>
-                <a:spcPts val="3000"/>
-              </a:lnSpc>
-            </a:pPr>
-            <a:r>
-              <a:rPr sz="3000" b="0">
-                <a:solidFill>
-                  <a:srgbClr val="9DC183"/>
                 </a:solidFill>
                 <a:latin typeface="Huninn"/>
                 <a:ea typeface="Huninn"/>
               </a:rPr>
-              <a:t>03</a:t>
-            </a:r>
-          </a:p>
-        </p:txBody>
-      </p:sp>
-      <p:sp>
-        <p:nvSpPr>
-          <p:cNvPr id="15" name="TextBox 14"/>
-          <p:cNvSpPr txBox="1"/>
-          <p:nvPr/>
-        </p:nvSpPr>
-        <p:spPr>
-          <a:xfrm>
-            <a:off x="8407300" y="3689002"/>
-            <a:ext cx="2698849" cy="342900"/>
-          </a:xfrm>
-          <a:prstGeom prst="rect">
-            <a:avLst/>
-          </a:prstGeom>
-          <a:noFill/>
-        </p:spPr>
-        <p:txBody>
-          <a:bodyPr wrap="square" lIns="0" rIns="0" tIns="0" bIns="0" anchor="t">
-            <a:spAutoFit/>
-          </a:bodyPr>
-          <a:lstStyle/>
-          <a:p>
-            <a:pPr algn="l">
-              <a:lnSpc>
-                <a:spcPts val="2400"/>
-              </a:lnSpc>
-            </a:pPr>
-            <a:r>
-              <a:rPr sz="1650" b="0">
-                <a:solidFill>
-                  <a:srgbClr val="3B2A20"/>
-                </a:solidFill>
-                <a:latin typeface="Noto Sans TC"/>
-                <a:ea typeface="Noto Sans TC"/>
-              </a:rPr>
-              <a:t>擺攤</a:t>
-            </a:r>
-          </a:p>
-        </p:txBody>
-      </p:sp>
-      <p:sp>
-        <p:nvSpPr>
-          <p:cNvPr id="16" name="TextBox 15"/>
-          <p:cNvSpPr txBox="1"/>
-          <p:nvPr/>
-        </p:nvSpPr>
-        <p:spPr>
-          <a:xfrm>
-            <a:off x="8407300" y="4050952"/>
-            <a:ext cx="2698849" cy="394245"/>
-          </a:xfrm>
-          <a:prstGeom prst="rect">
-            <a:avLst/>
-          </a:prstGeom>
-          <a:noFill/>
-        </p:spPr>
-        <p:txBody>
-          <a:bodyPr wrap="square" lIns="0" rIns="0" tIns="0" bIns="0" anchor="t">
-            <a:spAutoFit/>
-          </a:bodyPr>
-          <a:lstStyle/>
-          <a:p>
-            <a:pPr algn="l">
-              <a:lnSpc>
-                <a:spcPts val="2804"/>
-              </a:lnSpc>
-            </a:pPr>
-            <a:r>
-              <a:rPr sz="1650" b="0">
-                <a:solidFill>
-                  <a:srgbClr val="3B2A20"/>
-                </a:solidFill>
-                <a:latin typeface="Noto Sans TC"/>
-                <a:ea typeface="Noto Sans TC"/>
-              </a:rPr>
-              <a:t>週六早上八點進場。</a:t>
-            </a:r>
-          </a:p>
-        </p:txBody>
-      </p:sp>
-      <p:sp>
-        <p:nvSpPr>
-          <p:cNvPr id="17" name="TextBox 16"/>
+              <a:t>報名</a:t>
+            </a:r>
+          </a:p>
+        </p:txBody>
+      </p:sp>
+      <p:sp>
+        <p:nvSpPr>
+          <p:cNvPr id="6" name="TextBox 5"/>
           <p:cNvSpPr txBox="1"/>
           <p:nvPr/>
         </p:nvSpPr>
@@ -8217,7 +8174,139 @@
       </p:pic>
       <p:sp>
         <p:nvSpPr>
-          <p:cNvPr id="3" name="TextBox 2"/>
+          <p:cNvPr id="3" name="Rounded Rectangle 2"/>
+          <p:cNvSpPr/>
+          <p:nvPr/>
+        </p:nvSpPr>
+        <p:spPr>
+          <a:xfrm>
+            <a:off x="838200" y="2907952"/>
+            <a:ext cx="3251150" cy="1765845"/>
+          </a:xfrm>
+          <a:prstGeom prst="roundRect">
+            <a:avLst>
+              <a:gd name="adj" fmla="val 15103"/>
+            </a:avLst>
+          </a:prstGeom>
+          <a:solidFill>
+            <a:srgbClr val="F9C6C0"/>
+          </a:solidFill>
+          <a:ln>
+            <a:noFill/>
+          </a:ln>
+          <a:effectLst/>
+        </p:spPr>
+        <p:style>
+          <a:lnRef idx="1">
+            <a:schemeClr val="accent1"/>
+          </a:lnRef>
+          <a:fillRef idx="3">
+            <a:schemeClr val="accent1"/>
+          </a:fillRef>
+          <a:effectRef idx="2">
+            <a:schemeClr val="accent1"/>
+          </a:effectRef>
+          <a:fontRef idx="minor">
+            <a:schemeClr val="lt1"/>
+          </a:fontRef>
+        </p:style>
+        <p:txBody>
+          <a:bodyPr rtlCol="0" anchor="ctr"/>
+          <a:lstStyle/>
+          <a:p/>
+        </p:txBody>
+      </p:sp>
+      <p:sp>
+        <p:nvSpPr>
+          <p:cNvPr id="4" name="Rounded Rectangle 3"/>
+          <p:cNvSpPr/>
+          <p:nvPr/>
+        </p:nvSpPr>
+        <p:spPr>
+          <a:xfrm>
+            <a:off x="4470350" y="2907952"/>
+            <a:ext cx="3251150" cy="1765845"/>
+          </a:xfrm>
+          <a:prstGeom prst="roundRect">
+            <a:avLst>
+              <a:gd name="adj" fmla="val 15103"/>
+            </a:avLst>
+          </a:prstGeom>
+          <a:solidFill>
+            <a:srgbClr val="F6E27A"/>
+          </a:solidFill>
+          <a:ln>
+            <a:noFill/>
+          </a:ln>
+          <a:effectLst/>
+        </p:spPr>
+        <p:style>
+          <a:lnRef idx="1">
+            <a:schemeClr val="accent1"/>
+          </a:lnRef>
+          <a:fillRef idx="3">
+            <a:schemeClr val="accent1"/>
+          </a:fillRef>
+          <a:effectRef idx="2">
+            <a:schemeClr val="accent1"/>
+          </a:effectRef>
+          <a:fontRef idx="minor">
+            <a:schemeClr val="lt1"/>
+          </a:fontRef>
+        </p:style>
+        <p:txBody>
+          <a:bodyPr rtlCol="0" anchor="ctr"/>
+          <a:lstStyle/>
+          <a:p/>
+        </p:txBody>
+      </p:sp>
+      <p:sp>
+        <p:nvSpPr>
+          <p:cNvPr id="5" name="Rounded Rectangle 4"/>
+          <p:cNvSpPr/>
+          <p:nvPr/>
+        </p:nvSpPr>
+        <p:spPr>
+          <a:xfrm>
+            <a:off x="8102500" y="2907952"/>
+            <a:ext cx="3251299" cy="1765845"/>
+          </a:xfrm>
+          <a:prstGeom prst="roundRect">
+            <a:avLst>
+              <a:gd name="adj" fmla="val 15103"/>
+            </a:avLst>
+          </a:prstGeom>
+          <a:solidFill>
+            <a:srgbClr val="B9CDEB"/>
+          </a:solidFill>
+          <a:ln>
+            <a:noFill/>
+          </a:ln>
+          <a:effectLst/>
+        </p:spPr>
+        <p:style>
+          <a:lnRef idx="1">
+            <a:schemeClr val="accent1"/>
+          </a:lnRef>
+          <a:fillRef idx="3">
+            <a:schemeClr val="accent1"/>
+          </a:fillRef>
+          <a:effectRef idx="2">
+            <a:schemeClr val="accent1"/>
+          </a:effectRef>
+          <a:fontRef idx="minor">
+            <a:schemeClr val="lt1"/>
+          </a:fontRef>
+        </p:style>
+        <p:txBody>
+          <a:bodyPr rtlCol="0" anchor="ctr"/>
+          <a:lstStyle/>
+          <a:p/>
+        </p:txBody>
+      </p:sp>
+      <p:sp>
+        <p:nvSpPr>
+          <p:cNvPr id="6" name="TextBox 5"/>
           <p:cNvSpPr txBox="1"/>
           <p:nvPr/>
         </p:nvSpPr>
@@ -8257,13 +8346,13 @@
       </p:sp>
       <p:sp>
         <p:nvSpPr>
-          <p:cNvPr id="4" name="TextBox 3"/>
+          <p:cNvPr id="7" name="TextBox 6"/>
           <p:cNvSpPr txBox="1"/>
           <p:nvPr/>
         </p:nvSpPr>
         <p:spPr>
           <a:xfrm>
-            <a:off x="838200" y="2850802"/>
+            <a:off x="838200" y="838200"/>
             <a:ext cx="10572750" cy="533400"/>
           </a:xfrm>
           <a:prstGeom prst="rect">
@@ -8290,21 +8379,101 @@
                 <a:latin typeface="Huninn"/>
                 <a:ea typeface="Huninn"/>
               </a:rPr>
-              <a:t>下個週六，街口見。</a:t>
-            </a:r>
-          </a:p>
-        </p:txBody>
-      </p:sp>
-      <p:sp>
-        <p:nvSpPr>
-          <p:cNvPr id="5" name="TextBox 4"/>
+              <a:t>三步開始</a:t>
+            </a:r>
+          </a:p>
+        </p:txBody>
+      </p:sp>
+      <p:sp>
+        <p:nvSpPr>
+          <p:cNvPr id="8" name="TextBox 7"/>
           <p:cNvSpPr txBox="1"/>
           <p:nvPr/>
         </p:nvSpPr>
         <p:spPr>
           <a:xfrm>
-            <a:off x="838200" y="3650902"/>
-            <a:ext cx="10572750" cy="394245"/>
+            <a:off x="1143000" y="3174652"/>
+            <a:ext cx="2698700" cy="419100"/>
+          </a:xfrm>
+          <a:prstGeom prst="rect">
+            <a:avLst/>
+          </a:prstGeom>
+          <a:noFill/>
+        </p:spPr>
+        <p:txBody>
+          <a:bodyPr wrap="square" lIns="0" rIns="0" tIns="0" bIns="0" anchor="t">
+            <a:spAutoFit/>
+          </a:bodyPr>
+          <a:lstStyle/>
+          <a:p>
+            <a:pPr algn="l">
+              <a:lnSpc>
+                <a:spcPts val="3000"/>
+              </a:lnSpc>
+            </a:pPr>
+            <a:r>
+              <a:rPr sz="3000" b="0">
+                <a:solidFill>
+                  <a:srgbClr val="9DC183"/>
+                </a:solidFill>
+                <a:latin typeface="Huninn"/>
+                <a:ea typeface="Huninn"/>
+              </a:rPr>
+              <a:t>01</a:t>
+            </a:r>
+          </a:p>
+        </p:txBody>
+      </p:sp>
+      <p:sp>
+        <p:nvSpPr>
+          <p:cNvPr id="9" name="TextBox 8"/>
+          <p:cNvSpPr txBox="1"/>
+          <p:nvPr/>
+        </p:nvSpPr>
+        <p:spPr>
+          <a:xfrm>
+            <a:off x="1143000" y="3689002"/>
+            <a:ext cx="2698700" cy="342900"/>
+          </a:xfrm>
+          <a:prstGeom prst="rect">
+            <a:avLst/>
+          </a:prstGeom>
+          <a:noFill/>
+        </p:spPr>
+        <p:txBody>
+          <a:bodyPr wrap="square" lIns="0" rIns="0" tIns="0" bIns="0" anchor="t">
+            <a:spAutoFit/>
+          </a:bodyPr>
+          <a:lstStyle/>
+          <a:p>
+            <a:pPr algn="l">
+              <a:lnSpc>
+                <a:spcPts val="2400"/>
+              </a:lnSpc>
+            </a:pPr>
+            <a:r>
+              <a:rPr sz="1650" b="0">
+                <a:solidFill>
+                  <a:srgbClr val="3B2A20"/>
+                </a:solidFill>
+                <a:latin typeface="Noto Sans TC"/>
+                <a:ea typeface="Noto Sans TC"/>
+              </a:rPr>
+              <a:t>填表</a:t>
+            </a:r>
+          </a:p>
+        </p:txBody>
+      </p:sp>
+      <p:sp>
+        <p:nvSpPr>
+          <p:cNvPr id="10" name="TextBox 9"/>
+          <p:cNvSpPr txBox="1"/>
+          <p:nvPr/>
+        </p:nvSpPr>
+        <p:spPr>
+          <a:xfrm>
+            <a:off x="1143000" y="4050952"/>
+            <a:ext cx="2698700" cy="394245"/>
           </a:xfrm>
           <a:prstGeom prst="rect">
             <a:avLst/>
@@ -8330,14 +8499,254 @@
                 <a:latin typeface="Noto Sans TC"/>
                 <a:ea typeface="Noto Sans TC"/>
               </a:rPr>
-              <a:t>hop@market.example（示意，換成你的）</a:t>
-            </a:r>
-          </a:p>
-        </p:txBody>
-      </p:sp>
-      <p:sp>
-        <p:nvSpPr>
-          <p:cNvPr id="6" name="TextBox 5"/>
+              <a:t>三分鐘，寫你賣什麼。</a:t>
+            </a:r>
+          </a:p>
+        </p:txBody>
+      </p:sp>
+      <p:sp>
+        <p:nvSpPr>
+          <p:cNvPr id="11" name="TextBox 10"/>
+          <p:cNvSpPr txBox="1"/>
+          <p:nvPr/>
+        </p:nvSpPr>
+        <p:spPr>
+          <a:xfrm>
+            <a:off x="4775150" y="3174652"/>
+            <a:ext cx="2698700" cy="419100"/>
+          </a:xfrm>
+          <a:prstGeom prst="rect">
+            <a:avLst/>
+          </a:prstGeom>
+          <a:noFill/>
+        </p:spPr>
+        <p:txBody>
+          <a:bodyPr wrap="square" lIns="0" rIns="0" tIns="0" bIns="0" anchor="t">
+            <a:spAutoFit/>
+          </a:bodyPr>
+          <a:lstStyle/>
+          <a:p>
+            <a:pPr algn="l">
+              <a:lnSpc>
+                <a:spcPts val="3000"/>
+              </a:lnSpc>
+            </a:pPr>
+            <a:r>
+              <a:rPr sz="3000" b="0">
+                <a:solidFill>
+                  <a:srgbClr val="9DC183"/>
+                </a:solidFill>
+                <a:latin typeface="Huninn"/>
+                <a:ea typeface="Huninn"/>
+              </a:rPr>
+              <a:t>02</a:t>
+            </a:r>
+          </a:p>
+        </p:txBody>
+      </p:sp>
+      <p:sp>
+        <p:nvSpPr>
+          <p:cNvPr id="12" name="TextBox 11"/>
+          <p:cNvSpPr txBox="1"/>
+          <p:nvPr/>
+        </p:nvSpPr>
+        <p:spPr>
+          <a:xfrm>
+            <a:off x="4775150" y="3689002"/>
+            <a:ext cx="2698700" cy="342900"/>
+          </a:xfrm>
+          <a:prstGeom prst="rect">
+            <a:avLst/>
+          </a:prstGeom>
+          <a:noFill/>
+        </p:spPr>
+        <p:txBody>
+          <a:bodyPr wrap="square" lIns="0" rIns="0" tIns="0" bIns="0" anchor="t">
+            <a:spAutoFit/>
+          </a:bodyPr>
+          <a:lstStyle/>
+          <a:p>
+            <a:pPr algn="l">
+              <a:lnSpc>
+                <a:spcPts val="2400"/>
+              </a:lnSpc>
+            </a:pPr>
+            <a:r>
+              <a:rPr sz="1650" b="0">
+                <a:solidFill>
+                  <a:srgbClr val="3B2A20"/>
+                </a:solidFill>
+                <a:latin typeface="Noto Sans TC"/>
+                <a:ea typeface="Noto Sans TC"/>
+              </a:rPr>
+              <a:t>審核</a:t>
+            </a:r>
+          </a:p>
+        </p:txBody>
+      </p:sp>
+      <p:sp>
+        <p:nvSpPr>
+          <p:cNvPr id="13" name="TextBox 12"/>
+          <p:cNvSpPr txBox="1"/>
+          <p:nvPr/>
+        </p:nvSpPr>
+        <p:spPr>
+          <a:xfrm>
+            <a:off x="4775150" y="4050952"/>
+            <a:ext cx="2698700" cy="394245"/>
+          </a:xfrm>
+          <a:prstGeom prst="rect">
+            <a:avLst/>
+          </a:prstGeom>
+          <a:noFill/>
+        </p:spPr>
+        <p:txBody>
+          <a:bodyPr wrap="square" lIns="0" rIns="0" tIns="0" bIns="0" anchor="t">
+            <a:spAutoFit/>
+          </a:bodyPr>
+          <a:lstStyle/>
+          <a:p>
+            <a:pPr algn="l">
+              <a:lnSpc>
+                <a:spcPts val="2804"/>
+              </a:lnSpc>
+            </a:pPr>
+            <a:r>
+              <a:rPr sz="1650" b="0">
+                <a:solidFill>
+                  <a:srgbClr val="3B2A20"/>
+                </a:solidFill>
+                <a:latin typeface="Noto Sans TC"/>
+                <a:ea typeface="Noto Sans TC"/>
+              </a:rPr>
+              <a:t>一週內回覆。</a:t>
+            </a:r>
+          </a:p>
+        </p:txBody>
+      </p:sp>
+      <p:sp>
+        <p:nvSpPr>
+          <p:cNvPr id="14" name="TextBox 13"/>
+          <p:cNvSpPr txBox="1"/>
+          <p:nvPr/>
+        </p:nvSpPr>
+        <p:spPr>
+          <a:xfrm>
+            <a:off x="8407300" y="3174652"/>
+            <a:ext cx="2698849" cy="419100"/>
+          </a:xfrm>
+          <a:prstGeom prst="rect">
+            <a:avLst/>
+          </a:prstGeom>
+          <a:noFill/>
+        </p:spPr>
+        <p:txBody>
+          <a:bodyPr wrap="square" lIns="0" rIns="0" tIns="0" bIns="0" anchor="t">
+            <a:spAutoFit/>
+          </a:bodyPr>
+          <a:lstStyle/>
+          <a:p>
+            <a:pPr algn="l">
+              <a:lnSpc>
+                <a:spcPts val="3000"/>
+              </a:lnSpc>
+            </a:pPr>
+            <a:r>
+              <a:rPr sz="3000" b="0">
+                <a:solidFill>
+                  <a:srgbClr val="9DC183"/>
+                </a:solidFill>
+                <a:latin typeface="Huninn"/>
+                <a:ea typeface="Huninn"/>
+              </a:rPr>
+              <a:t>03</a:t>
+            </a:r>
+          </a:p>
+        </p:txBody>
+      </p:sp>
+      <p:sp>
+        <p:nvSpPr>
+          <p:cNvPr id="15" name="TextBox 14"/>
+          <p:cNvSpPr txBox="1"/>
+          <p:nvPr/>
+        </p:nvSpPr>
+        <p:spPr>
+          <a:xfrm>
+            <a:off x="8407300" y="3689002"/>
+            <a:ext cx="2698849" cy="342900"/>
+          </a:xfrm>
+          <a:prstGeom prst="rect">
+            <a:avLst/>
+          </a:prstGeom>
+          <a:noFill/>
+        </p:spPr>
+        <p:txBody>
+          <a:bodyPr wrap="square" lIns="0" rIns="0" tIns="0" bIns="0" anchor="t">
+            <a:spAutoFit/>
+          </a:bodyPr>
+          <a:lstStyle/>
+          <a:p>
+            <a:pPr algn="l">
+              <a:lnSpc>
+                <a:spcPts val="2400"/>
+              </a:lnSpc>
+            </a:pPr>
+            <a:r>
+              <a:rPr sz="1650" b="0">
+                <a:solidFill>
+                  <a:srgbClr val="3B2A20"/>
+                </a:solidFill>
+                <a:latin typeface="Noto Sans TC"/>
+                <a:ea typeface="Noto Sans TC"/>
+              </a:rPr>
+              <a:t>擺攤</a:t>
+            </a:r>
+          </a:p>
+        </p:txBody>
+      </p:sp>
+      <p:sp>
+        <p:nvSpPr>
+          <p:cNvPr id="16" name="TextBox 15"/>
+          <p:cNvSpPr txBox="1"/>
+          <p:nvPr/>
+        </p:nvSpPr>
+        <p:spPr>
+          <a:xfrm>
+            <a:off x="8407300" y="4050952"/>
+            <a:ext cx="2698849" cy="394245"/>
+          </a:xfrm>
+          <a:prstGeom prst="rect">
+            <a:avLst/>
+          </a:prstGeom>
+          <a:noFill/>
+        </p:spPr>
+        <p:txBody>
+          <a:bodyPr wrap="square" lIns="0" rIns="0" tIns="0" bIns="0" anchor="t">
+            <a:spAutoFit/>
+          </a:bodyPr>
+          <a:lstStyle/>
+          <a:p>
+            <a:pPr algn="l">
+              <a:lnSpc>
+                <a:spcPts val="2804"/>
+              </a:lnSpc>
+            </a:pPr>
+            <a:r>
+              <a:rPr sz="1650" b="0">
+                <a:solidFill>
+                  <a:srgbClr val="3B2A20"/>
+                </a:solidFill>
+                <a:latin typeface="Noto Sans TC"/>
+                <a:ea typeface="Noto Sans TC"/>
+              </a:rPr>
+              <a:t>週六早上八點進場。</a:t>
+            </a:r>
+          </a:p>
+        </p:txBody>
+      </p:sp>
+      <p:sp>
+        <p:nvSpPr>
+          <p:cNvPr id="17" name="TextBox 16"/>
           <p:cNvSpPr txBox="1"/>
           <p:nvPr/>
         </p:nvSpPr>
